--- a/workshops/2026/bridges-summer26/slides/evaluation.pptx
+++ b/workshops/2026/bridges-summer26/slides/evaluation.pptx
@@ -199,7 +199,7 @@
           <a:p>
             <a:fld id="{3A1AD42D-B26E-7740-9CE7-E59BFB64080A}" type="datetimeFigureOut">
               <a:rPr lang="en-US" smtClean="0"/>
-              <a:t>6/20/24</a:t>
+              <a:t>6/14/26</a:t>
             </a:fld>
             <a:endParaRPr lang="en-US"/>
           </a:p>
@@ -512,7 +512,13 @@
           <a:p>
             <a:r>
               <a:rPr lang="en-US" dirty="0"/>
-              <a:t>Education and information technology </a:t>
+              <a:t>1.  BRIDGES Assignment Surveys for students—Qualtrics, anonymous (coded), short, Instructor Surveys at end of the semester for feedback .</a:t>
+            </a:r>
+          </a:p>
+          <a:p>
+            <a:r>
+              <a:rPr lang="en-US" dirty="0"/>
+              <a:t>2 Education and information technology </a:t>
             </a:r>
           </a:p>
         </p:txBody>
@@ -544,6 +550,186 @@
     <p:extLst>
       <p:ext uri="{BB962C8B-B14F-4D97-AF65-F5344CB8AC3E}">
         <p14:creationId xmlns:p14="http://schemas.microsoft.com/office/powerpoint/2010/main" val="3657645354"/>
+      </p:ext>
+    </p:extLst>
+  </p:cSld>
+  <p:clrMapOvr>
+    <a:masterClrMapping/>
+  </p:clrMapOvr>
+</p:notes>
+</file>
+
+<file path=ppt/notesSlides/notesSlide2.xml><?xml version="1.0" encoding="utf-8"?>
+<p:notes xmlns:a="http://schemas.openxmlformats.org/drawingml/2006/main" xmlns:r="http://schemas.openxmlformats.org/officeDocument/2006/relationships" xmlns:p="http://schemas.openxmlformats.org/presentationml/2006/main">
+  <p:cSld>
+    <p:spTree>
+      <p:nvGrpSpPr>
+        <p:cNvPr id="1" name=""/>
+        <p:cNvGrpSpPr/>
+        <p:nvPr/>
+      </p:nvGrpSpPr>
+      <p:grpSpPr>
+        <a:xfrm>
+          <a:off x="0" y="0"/>
+          <a:ext cx="0" cy="0"/>
+          <a:chOff x="0" y="0"/>
+          <a:chExt cx="0" cy="0"/>
+        </a:xfrm>
+      </p:grpSpPr>
+      <p:sp>
+        <p:nvSpPr>
+          <p:cNvPr id="2" name="Slide Image Placeholder 1"/>
+          <p:cNvSpPr>
+            <a:spLocks noGrp="1" noRot="1" noChangeAspect="1"/>
+          </p:cNvSpPr>
+          <p:nvPr>
+            <p:ph type="sldImg"/>
+          </p:nvPr>
+        </p:nvSpPr>
+        <p:spPr/>
+      </p:sp>
+      <p:sp>
+        <p:nvSpPr>
+          <p:cNvPr id="3" name="Notes Placeholder 2"/>
+          <p:cNvSpPr>
+            <a:spLocks noGrp="1"/>
+          </p:cNvSpPr>
+          <p:nvPr>
+            <p:ph type="body" idx="1"/>
+          </p:nvPr>
+        </p:nvSpPr>
+        <p:spPr/>
+        <p:txBody>
+          <a:bodyPr/>
+          <a:lstStyle/>
+          <a:p>
+            <a:r>
+              <a:rPr lang="en-US" dirty="0"/>
+              <a:t>Even though all student took &amp; passed the required prerequisite course before taking Data structures, there were some who were not sufficiently prepared.—lot of research focus on </a:t>
+            </a:r>
+            <a:r>
+              <a:rPr lang="en-US" dirty="0" err="1"/>
+              <a:t>prerquisite</a:t>
+            </a:r>
+            <a:r>
+              <a:rPr lang="en-US"/>
+              <a:t> proficiency. </a:t>
+            </a:r>
+            <a:endParaRPr lang="en-US" dirty="0"/>
+          </a:p>
+        </p:txBody>
+      </p:sp>
+      <p:sp>
+        <p:nvSpPr>
+          <p:cNvPr id="4" name="Slide Number Placeholder 3"/>
+          <p:cNvSpPr>
+            <a:spLocks noGrp="1"/>
+          </p:cNvSpPr>
+          <p:nvPr>
+            <p:ph type="sldNum" sz="quarter" idx="5"/>
+          </p:nvPr>
+        </p:nvSpPr>
+        <p:spPr/>
+        <p:txBody>
+          <a:bodyPr/>
+          <a:lstStyle/>
+          <a:p>
+            <a:fld id="{ECF3E0F3-3CDC-314B-B3F4-F4303610F2A2}" type="slidenum">
+              <a:rPr lang="en-US" smtClean="0"/>
+              <a:t>2</a:t>
+            </a:fld>
+            <a:endParaRPr lang="en-US"/>
+          </a:p>
+        </p:txBody>
+      </p:sp>
+    </p:spTree>
+    <p:extLst>
+      <p:ext uri="{BB962C8B-B14F-4D97-AF65-F5344CB8AC3E}">
+        <p14:creationId xmlns:p14="http://schemas.microsoft.com/office/powerpoint/2010/main" val="852694685"/>
+      </p:ext>
+    </p:extLst>
+  </p:cSld>
+  <p:clrMapOvr>
+    <a:masterClrMapping/>
+  </p:clrMapOvr>
+</p:notes>
+</file>
+
+<file path=ppt/notesSlides/notesSlide3.xml><?xml version="1.0" encoding="utf-8"?>
+<p:notes xmlns:a="http://schemas.openxmlformats.org/drawingml/2006/main" xmlns:r="http://schemas.openxmlformats.org/officeDocument/2006/relationships" xmlns:p="http://schemas.openxmlformats.org/presentationml/2006/main">
+  <p:cSld>
+    <p:spTree>
+      <p:nvGrpSpPr>
+        <p:cNvPr id="1" name=""/>
+        <p:cNvGrpSpPr/>
+        <p:nvPr/>
+      </p:nvGrpSpPr>
+      <p:grpSpPr>
+        <a:xfrm>
+          <a:off x="0" y="0"/>
+          <a:ext cx="0" cy="0"/>
+          <a:chOff x="0" y="0"/>
+          <a:chExt cx="0" cy="0"/>
+        </a:xfrm>
+      </p:grpSpPr>
+      <p:sp>
+        <p:nvSpPr>
+          <p:cNvPr id="2" name="Slide Image Placeholder 1"/>
+          <p:cNvSpPr>
+            <a:spLocks noGrp="1" noRot="1" noChangeAspect="1"/>
+          </p:cNvSpPr>
+          <p:nvPr>
+            <p:ph type="sldImg"/>
+          </p:nvPr>
+        </p:nvSpPr>
+        <p:spPr/>
+      </p:sp>
+      <p:sp>
+        <p:nvSpPr>
+          <p:cNvPr id="3" name="Notes Placeholder 2"/>
+          <p:cNvSpPr>
+            <a:spLocks noGrp="1"/>
+          </p:cNvSpPr>
+          <p:nvPr>
+            <p:ph type="body" idx="1"/>
+          </p:nvPr>
+        </p:nvSpPr>
+        <p:spPr/>
+        <p:txBody>
+          <a:bodyPr/>
+          <a:lstStyle/>
+          <a:p>
+            <a:endParaRPr lang="en-US"/>
+          </a:p>
+        </p:txBody>
+      </p:sp>
+      <p:sp>
+        <p:nvSpPr>
+          <p:cNvPr id="4" name="Slide Number Placeholder 3"/>
+          <p:cNvSpPr>
+            <a:spLocks noGrp="1"/>
+          </p:cNvSpPr>
+          <p:nvPr>
+            <p:ph type="sldNum" sz="quarter" idx="5"/>
+          </p:nvPr>
+        </p:nvSpPr>
+        <p:spPr/>
+        <p:txBody>
+          <a:bodyPr/>
+          <a:lstStyle/>
+          <a:p>
+            <a:fld id="{ECF3E0F3-3CDC-314B-B3F4-F4303610F2A2}" type="slidenum">
+              <a:rPr lang="en-US" smtClean="0"/>
+              <a:t>3</a:t>
+            </a:fld>
+            <a:endParaRPr lang="en-US"/>
+          </a:p>
+        </p:txBody>
+      </p:sp>
+    </p:spTree>
+    <p:extLst>
+      <p:ext uri="{BB962C8B-B14F-4D97-AF65-F5344CB8AC3E}">
+        <p14:creationId xmlns:p14="http://schemas.microsoft.com/office/powerpoint/2010/main" val="215471826"/>
       </p:ext>
     </p:extLst>
   </p:cSld>
@@ -700,7 +886,7 @@
           <a:p>
             <a:fld id="{5E6E53D6-7B33-BF49-84DC-DBA39AD42218}" type="datetimeFigureOut">
               <a:rPr lang="en-US" smtClean="0"/>
-              <a:t>6/20/24</a:t>
+              <a:t>6/14/26</a:t>
             </a:fld>
             <a:endParaRPr lang="en-US"/>
           </a:p>
@@ -898,7 +1084,7 @@
           <a:p>
             <a:fld id="{5E6E53D6-7B33-BF49-84DC-DBA39AD42218}" type="datetimeFigureOut">
               <a:rPr lang="en-US" smtClean="0"/>
-              <a:t>6/20/24</a:t>
+              <a:t>6/14/26</a:t>
             </a:fld>
             <a:endParaRPr lang="en-US"/>
           </a:p>
@@ -1106,7 +1292,7 @@
           <a:p>
             <a:fld id="{5E6E53D6-7B33-BF49-84DC-DBA39AD42218}" type="datetimeFigureOut">
               <a:rPr lang="en-US" smtClean="0"/>
-              <a:t>6/20/24</a:t>
+              <a:t>6/14/26</a:t>
             </a:fld>
             <a:endParaRPr lang="en-US"/>
           </a:p>
@@ -1304,7 +1490,7 @@
           <a:p>
             <a:fld id="{5E6E53D6-7B33-BF49-84DC-DBA39AD42218}" type="datetimeFigureOut">
               <a:rPr lang="en-US" smtClean="0"/>
-              <a:t>6/20/24</a:t>
+              <a:t>6/14/26</a:t>
             </a:fld>
             <a:endParaRPr lang="en-US"/>
           </a:p>
@@ -1579,7 +1765,7 @@
           <a:p>
             <a:fld id="{5E6E53D6-7B33-BF49-84DC-DBA39AD42218}" type="datetimeFigureOut">
               <a:rPr lang="en-US" smtClean="0"/>
-              <a:t>6/20/24</a:t>
+              <a:t>6/14/26</a:t>
             </a:fld>
             <a:endParaRPr lang="en-US"/>
           </a:p>
@@ -1844,7 +2030,7 @@
           <a:p>
             <a:fld id="{5E6E53D6-7B33-BF49-84DC-DBA39AD42218}" type="datetimeFigureOut">
               <a:rPr lang="en-US" smtClean="0"/>
-              <a:t>6/20/24</a:t>
+              <a:t>6/14/26</a:t>
             </a:fld>
             <a:endParaRPr lang="en-US"/>
           </a:p>
@@ -2256,7 +2442,7 @@
           <a:p>
             <a:fld id="{5E6E53D6-7B33-BF49-84DC-DBA39AD42218}" type="datetimeFigureOut">
               <a:rPr lang="en-US" smtClean="0"/>
-              <a:t>6/20/24</a:t>
+              <a:t>6/14/26</a:t>
             </a:fld>
             <a:endParaRPr lang="en-US"/>
           </a:p>
@@ -2397,7 +2583,7 @@
           <a:p>
             <a:fld id="{5E6E53D6-7B33-BF49-84DC-DBA39AD42218}" type="datetimeFigureOut">
               <a:rPr lang="en-US" smtClean="0"/>
-              <a:t>6/20/24</a:t>
+              <a:t>6/14/26</a:t>
             </a:fld>
             <a:endParaRPr lang="en-US"/>
           </a:p>
@@ -2510,7 +2696,7 @@
           <a:p>
             <a:fld id="{5E6E53D6-7B33-BF49-84DC-DBA39AD42218}" type="datetimeFigureOut">
               <a:rPr lang="en-US" smtClean="0"/>
-              <a:t>6/20/24</a:t>
+              <a:t>6/14/26</a:t>
             </a:fld>
             <a:endParaRPr lang="en-US"/>
           </a:p>
@@ -2821,7 +3007,7 @@
           <a:p>
             <a:fld id="{5E6E53D6-7B33-BF49-84DC-DBA39AD42218}" type="datetimeFigureOut">
               <a:rPr lang="en-US" smtClean="0"/>
-              <a:t>6/20/24</a:t>
+              <a:t>6/14/26</a:t>
             </a:fld>
             <a:endParaRPr lang="en-US"/>
           </a:p>
@@ -3109,7 +3295,7 @@
           <a:p>
             <a:fld id="{5E6E53D6-7B33-BF49-84DC-DBA39AD42218}" type="datetimeFigureOut">
               <a:rPr lang="en-US" smtClean="0"/>
-              <a:t>6/20/24</a:t>
+              <a:t>6/14/26</a:t>
             </a:fld>
             <a:endParaRPr lang="en-US"/>
           </a:p>
@@ -3350,7 +3536,7 @@
           <a:p>
             <a:fld id="{5E6E53D6-7B33-BF49-84DC-DBA39AD42218}" type="datetimeFigureOut">
               <a:rPr lang="en-US" smtClean="0"/>
-              <a:t>6/20/24</a:t>
+              <a:t>6/14/26</a:t>
             </a:fld>
             <a:endParaRPr lang="en-US"/>
           </a:p>
@@ -4021,13 +4207,13 @@
   <p:clrMapOvr>
     <a:masterClrMapping/>
   </p:clrMapOvr>
-  <mc:AlternateContent xmlns:mc="http://schemas.openxmlformats.org/markup-compatibility/2006">
-    <mc:Choice xmlns:p14="http://schemas.microsoft.com/office/powerpoint/2010/main" Requires="p14">
+  <mc:AlternateContent xmlns:mc="http://schemas.openxmlformats.org/markup-compatibility/2006" xmlns:p14="http://schemas.microsoft.com/office/powerpoint/2010/main">
+    <mc:Choice Requires="p14">
       <p:transition spd="med" p14:dur="700">
         <p:fade/>
       </p:transition>
     </mc:Choice>
-    <mc:Fallback>
+    <mc:Fallback xmlns="">
       <p:transition spd="med">
         <p:fade/>
       </p:transition>
@@ -5075,6 +5261,13 @@
             <a:r>
               <a:rPr lang="en-US" dirty="0"/>
               <a:t>Results showed demographic differences were not limited to prerequisite proficiency but included all the subcomponents of our pretest. </a:t>
+            </a:r>
+          </a:p>
+          <a:p>
+            <a:pPr lvl="1"/>
+            <a:r>
+              <a:rPr lang="en-US" dirty="0"/>
+              <a:t>Details : Goolkasian et al., ACM Trans on Comp. Educ.), 2026</a:t>
             </a:r>
           </a:p>
         </p:txBody>
@@ -5655,6 +5848,91 @@
                                   </p:childTnLst>
                                 </p:cTn>
                               </p:par>
+                              <p:par>
+                                <p:cTn id="33" presetID="2" presetClass="entr" presetSubtype="4" fill="hold" nodeType="withEffect">
+                                  <p:stCondLst>
+                                    <p:cond delay="0"/>
+                                  </p:stCondLst>
+                                  <p:childTnLst>
+                                    <p:set>
+                                      <p:cBhvr>
+                                        <p:cTn id="34" dur="1" fill="hold">
+                                          <p:stCondLst>
+                                            <p:cond delay="0"/>
+                                          </p:stCondLst>
+                                        </p:cTn>
+                                        <p:tgtEl>
+                                          <p:spTgt spid="3">
+                                            <p:txEl>
+                                              <p:pRg st="7" end="7"/>
+                                            </p:txEl>
+                                          </p:spTgt>
+                                        </p:tgtEl>
+                                        <p:attrNameLst>
+                                          <p:attrName>style.visibility</p:attrName>
+                                        </p:attrNameLst>
+                                      </p:cBhvr>
+                                      <p:to>
+                                        <p:strVal val="visible"/>
+                                      </p:to>
+                                    </p:set>
+                                    <p:anim calcmode="lin" valueType="num">
+                                      <p:cBhvr additive="base">
+                                        <p:cTn id="35" dur="500" fill="hold"/>
+                                        <p:tgtEl>
+                                          <p:spTgt spid="3">
+                                            <p:txEl>
+                                              <p:pRg st="7" end="7"/>
+                                            </p:txEl>
+                                          </p:spTgt>
+                                        </p:tgtEl>
+                                        <p:attrNameLst>
+                                          <p:attrName>ppt_x</p:attrName>
+                                        </p:attrNameLst>
+                                      </p:cBhvr>
+                                      <p:tavLst>
+                                        <p:tav tm="0">
+                                          <p:val>
+                                            <p:strVal val="#ppt_x"/>
+                                          </p:val>
+                                        </p:tav>
+                                        <p:tav tm="100000">
+                                          <p:val>
+                                            <p:strVal val="#ppt_x"/>
+                                          </p:val>
+                                        </p:tav>
+                                      </p:tavLst>
+                                    </p:anim>
+                                    <p:anim calcmode="lin" valueType="num">
+                                      <p:cBhvr additive="base">
+                                        <p:cTn id="36" dur="500" fill="hold"/>
+                                        <p:tgtEl>
+                                          <p:spTgt spid="3">
+                                            <p:txEl>
+                                              <p:pRg st="7" end="7"/>
+                                            </p:txEl>
+                                          </p:spTgt>
+                                        </p:tgtEl>
+                                        <p:attrNameLst>
+                                          <p:attrName>ppt_y</p:attrName>
+                                        </p:attrNameLst>
+                                      </p:cBhvr>
+                                      <p:tavLst>
+                                        <p:tav tm="0">
+                                          <p:val>
+                                            <p:strVal val="1+#ppt_h/2"/>
+                                          </p:val>
+                                        </p:tav>
+                                        <p:tav tm="100000">
+                                          <p:val>
+                                            <p:strVal val="#ppt_y"/>
+                                          </p:val>
+                                        </p:tav>
+                                      </p:tavLst>
+                                    </p:anim>
+                                  </p:childTnLst>
+                                </p:cTn>
+                              </p:par>
                             </p:childTnLst>
                           </p:cTn>
                         </p:par>
@@ -5775,14 +6053,14 @@
             <a:pPr lvl="1"/>
             <a:r>
               <a:rPr lang="en-US" dirty="0"/>
-              <a:t>You have to provide an arbitrary code that the students uses </a:t>
+              <a:t>You provide an arbitrary code that the students uses rather than a name.</a:t>
             </a:r>
           </a:p>
           <a:p>
             <a:pPr lvl="1"/>
             <a:r>
               <a:rPr lang="en-US" dirty="0"/>
-              <a:t>I will return to you a summary of the students responses to each of the projects.</a:t>
+              <a:t>I will return to you a summary of the students’ responses to each of the projects.</a:t>
             </a:r>
           </a:p>
           <a:p>
